--- a/exoticmorph-backend/demo_morph.pptx
+++ b/exoticmorph-backend/demo_morph.pptx
@@ -3507,7 +3507,7 @@
               </a:defRPr>
             </a:pPr>
             <a:r>
-              <a:t>• Schema Conformance: Chèn trước thẻ &lt;p:clrMapOvr&gt; hợp lệ ISO/IEC</a:t>
+              <a:t>• Schema Conformance: Chèn transition sau &lt;p:clrMapOvr&gt;, trước &lt;p:timing&gt; (đúng CT_Slide ISO/IEC)</a:t>
             </a:r>
           </a:p>
           <a:p>
@@ -3529,12 +3529,21 @@
       </p:sp>
     </p:spTree>
   </p:cSld>
-  <p:transition advClick="1" spd="med">
-    <p:morph option="byObject"/>
-  </p:transition>
   <p:clrMapOvr>
     <a:masterClrMapping/>
   </p:clrMapOvr>
+  <mc:AlternateContent xmlns:mc="http://schemas.openxmlformats.org/markup-compatibility/2006">
+    <mc:Choice xmlns:p16="http://schemas.microsoft.com/office/powerpoint/2015/09/main" Requires="p16">
+      <p:transition xmlns:p14="http://schemas.microsoft.com/office/powerpoint/2010/main" spd="med" p14:dur="1250" advClick="1">
+        <p16:morph option="byObject"/>
+      </p:transition>
+    </mc:Choice>
+    <mc:Fallback>
+      <p:transition spd="med" advClick="1">
+        <p:fade/>
+      </p:transition>
+    </mc:Fallback>
+  </mc:AlternateContent>
 </p:sld>
 </file>
 
